--- a/Project 3/Dissemination/Project 3 Final Presentation.pptx
+++ b/Project 3/Dissemination/Project 3 Final Presentation.pptx
@@ -122,7 +122,7 @@
 <file path=ppt/revisionInfo.xml><?xml version="1.0" encoding="utf-8"?>
 <p1510:revInfo xmlns:a="http://schemas.openxmlformats.org/drawingml/2006/main" xmlns:r="http://schemas.openxmlformats.org/officeDocument/2006/relationships" xmlns:p1510="http://schemas.microsoft.com/office/powerpoint/2015/10/main">
   <p1510:revLst>
-    <p1510:client id="{16AFAC2D-BDF8-9FAA-081A-F9E0769008B3}" v="48" dt="2026-04-22T01:46:04.669"/>
+    <p1510:client id="{16AFAC2D-BDF8-9FAA-081A-F9E0769008B3}" v="75" dt="2026-04-22T02:16:27.743"/>
     <p1510:client id="{53AB8E98-024D-8563-44A0-5DB75E078257}" v="24" dt="2026-04-21T21:21:02.244"/>
     <p1510:client id="{A7CA2AE1-E782-CEC8-9A16-0F4AAE7E6921}" v="1694" dt="2026-04-21T21:16:56.531"/>
   </p1510:revLst>
@@ -134,10 +134,33 @@
   <pc:docChgLst>
     <pc:chgData name="Robledo, Kayla" userId="S::kayla.robledo@cuanschutz.edu::6eb23104-6d90-4085-b81a-901d881bfb4e" providerId="AD" clId="Web-{16AFAC2D-BDF8-9FAA-081A-F9E0769008B3}"/>
     <pc:docChg chg="modSld">
-      <pc:chgData name="Robledo, Kayla" userId="S::kayla.robledo@cuanschutz.edu::6eb23104-6d90-4085-b81a-901d881bfb4e" providerId="AD" clId="Web-{16AFAC2D-BDF8-9FAA-081A-F9E0769008B3}" dt="2026-04-22T01:46:04.669" v="47" actId="20577"/>
+      <pc:chgData name="Robledo, Kayla" userId="S::kayla.robledo@cuanschutz.edu::6eb23104-6d90-4085-b81a-901d881bfb4e" providerId="AD" clId="Web-{16AFAC2D-BDF8-9FAA-081A-F9E0769008B3}" dt="2026-04-22T02:16:27.743" v="74" actId="20577"/>
       <pc:docMkLst>
         <pc:docMk/>
       </pc:docMkLst>
+      <pc:sldChg chg="addSp modSp">
+        <pc:chgData name="Robledo, Kayla" userId="S::kayla.robledo@cuanschutz.edu::6eb23104-6d90-4085-b81a-901d881bfb4e" providerId="AD" clId="Web-{16AFAC2D-BDF8-9FAA-081A-F9E0769008B3}" dt="2026-04-22T02:16:27.743" v="74" actId="20577"/>
+        <pc:sldMkLst>
+          <pc:docMk/>
+          <pc:sldMk cId="3042945238" sldId="256"/>
+        </pc:sldMkLst>
+        <pc:spChg chg="mod">
+          <ac:chgData name="Robledo, Kayla" userId="S::kayla.robledo@cuanschutz.edu::6eb23104-6d90-4085-b81a-901d881bfb4e" providerId="AD" clId="Web-{16AFAC2D-BDF8-9FAA-081A-F9E0769008B3}" dt="2026-04-22T02:16:27.743" v="74" actId="20577"/>
+          <ac:spMkLst>
+            <pc:docMk/>
+            <pc:sldMk cId="3042945238" sldId="256"/>
+            <ac:spMk id="2" creationId="{2CA41967-859D-974A-1755-C2887E1C11EB}"/>
+          </ac:spMkLst>
+        </pc:spChg>
+        <pc:spChg chg="add mod">
+          <ac:chgData name="Robledo, Kayla" userId="S::kayla.robledo@cuanschutz.edu::6eb23104-6d90-4085-b81a-901d881bfb4e" providerId="AD" clId="Web-{16AFAC2D-BDF8-9FAA-081A-F9E0769008B3}" dt="2026-04-22T02:16:01.727" v="69" actId="20577"/>
+          <ac:spMkLst>
+            <pc:docMk/>
+            <pc:sldMk cId="3042945238" sldId="256"/>
+            <ac:spMk id="5" creationId="{612905C1-66D3-3C03-E8C3-F058C71584A8}"/>
+          </ac:spMkLst>
+        </pc:spChg>
+      </pc:sldChg>
       <pc:sldChg chg="modSp">
         <pc:chgData name="Robledo, Kayla" userId="S::kayla.robledo@cuanschutz.edu::6eb23104-6d90-4085-b81a-901d881bfb4e" providerId="AD" clId="Web-{16AFAC2D-BDF8-9FAA-081A-F9E0769008B3}" dt="2026-04-22T01:46:04.669" v="47" actId="20577"/>
         <pc:sldMkLst>
@@ -154,7 +177,7 @@
         </pc:spChg>
       </pc:sldChg>
       <pc:sldChg chg="addSp delSp modSp">
-        <pc:chgData name="Robledo, Kayla" userId="S::kayla.robledo@cuanschutz.edu::6eb23104-6d90-4085-b81a-901d881bfb4e" providerId="AD" clId="Web-{16AFAC2D-BDF8-9FAA-081A-F9E0769008B3}" dt="2026-04-22T01:42:29.934" v="7" actId="1076"/>
+        <pc:chgData name="Robledo, Kayla" userId="S::kayla.robledo@cuanschutz.edu::6eb23104-6d90-4085-b81a-901d881bfb4e" providerId="AD" clId="Web-{16AFAC2D-BDF8-9FAA-081A-F9E0769008B3}" dt="2026-04-22T02:14:21.100" v="54" actId="1076"/>
         <pc:sldMkLst>
           <pc:docMk/>
           <pc:sldMk cId="109107563" sldId="260"/>
@@ -168,7 +191,15 @@
           </ac:picMkLst>
         </pc:picChg>
         <pc:picChg chg="add mod">
-          <ac:chgData name="Robledo, Kayla" userId="S::kayla.robledo@cuanschutz.edu::6eb23104-6d90-4085-b81a-901d881bfb4e" providerId="AD" clId="Web-{16AFAC2D-BDF8-9FAA-081A-F9E0769008B3}" dt="2026-04-22T01:42:21.528" v="5" actId="1076"/>
+          <ac:chgData name="Robledo, Kayla" userId="S::kayla.robledo@cuanschutz.edu::6eb23104-6d90-4085-b81a-901d881bfb4e" providerId="AD" clId="Web-{16AFAC2D-BDF8-9FAA-081A-F9E0769008B3}" dt="2026-04-22T02:14:21.100" v="54" actId="1076"/>
+          <ac:picMkLst>
+            <pc:docMk/>
+            <pc:sldMk cId="109107563" sldId="260"/>
+            <ac:picMk id="2" creationId="{A48DA032-433E-39A8-9953-4534719D0F01}"/>
+          </ac:picMkLst>
+        </pc:picChg>
+        <pc:picChg chg="add del mod">
+          <ac:chgData name="Robledo, Kayla" userId="S::kayla.robledo@cuanschutz.edu::6eb23104-6d90-4085-b81a-901d881bfb4e" providerId="AD" clId="Web-{16AFAC2D-BDF8-9FAA-081A-F9E0769008B3}" dt="2026-04-22T02:13:40.553" v="48"/>
           <ac:picMkLst>
             <pc:docMk/>
             <pc:sldMk cId="109107563" sldId="260"/>
@@ -204,6 +235,21 @@
             <pc:docMk/>
             <pc:sldMk cId="114623721" sldId="261"/>
             <ac:spMk id="3" creationId="{56C8ED08-7C22-EB1D-87CC-7656DBFFF661}"/>
+          </ac:spMkLst>
+        </pc:spChg>
+      </pc:sldChg>
+      <pc:sldChg chg="modSp">
+        <pc:chgData name="Robledo, Kayla" userId="S::kayla.robledo@cuanschutz.edu::6eb23104-6d90-4085-b81a-901d881bfb4e" providerId="AD" clId="Web-{16AFAC2D-BDF8-9FAA-081A-F9E0769008B3}" dt="2026-04-22T02:14:46.773" v="60" actId="20577"/>
+        <pc:sldMkLst>
+          <pc:docMk/>
+          <pc:sldMk cId="1047344277" sldId="263"/>
+        </pc:sldMkLst>
+        <pc:spChg chg="mod">
+          <ac:chgData name="Robledo, Kayla" userId="S::kayla.robledo@cuanschutz.edu::6eb23104-6d90-4085-b81a-901d881bfb4e" providerId="AD" clId="Web-{16AFAC2D-BDF8-9FAA-081A-F9E0769008B3}" dt="2026-04-22T02:14:46.773" v="60" actId="20577"/>
+          <ac:spMkLst>
+            <pc:docMk/>
+            <pc:sldMk cId="1047344277" sldId="263"/>
+            <ac:spMk id="3" creationId="{D6EBD690-787C-5013-35C8-AD6C9D793708}"/>
           </ac:spMkLst>
         </pc:spChg>
       </pc:sldChg>
@@ -9677,15 +9723,21 @@
               <a:rPr lang="en-US" sz="6600" dirty="0">
                 <a:cs typeface="Arial"/>
               </a:rPr>
-              <a:t>Stroke Survival </a:t>
+              <a:t>Ten-Year Stroke </a:t>
             </a:r>
             <a:r>
               <a:rPr lang="en-US" sz="6600">
                 <a:cs typeface="Arial"/>
               </a:rPr>
-              <a:t>in the Framingham Heart Study</a:t>
-            </a:r>
-            <a:endParaRPr lang="en-US" sz="6600"/>
+              <a:t>Risk in the </a:t>
+            </a:r>
+            <a:r>
+              <a:rPr lang="en-US" sz="6600" dirty="0">
+                <a:cs typeface="Arial"/>
+              </a:rPr>
+              <a:t>Framingham Heart Study</a:t>
+            </a:r>
+            <a:endParaRPr lang="en-US" sz="6600" dirty="0"/>
           </a:p>
         </p:txBody>
       </p:sp>
@@ -9750,6 +9802,282 @@
               </a:solidFill>
               <a:cs typeface="Arial"/>
             </a:endParaRPr>
+          </a:p>
+        </p:txBody>
+      </p:sp>
+      <p:sp>
+        <p:nvSpPr>
+          <p:cNvPr id="5" name="Subtitle 2">
+            <a:extLst>
+              <a:ext uri="{FF2B5EF4-FFF2-40B4-BE49-F238E27FC236}">
+                <a16:creationId xmlns:a16="http://schemas.microsoft.com/office/drawing/2014/main" id="{612905C1-66D3-3C03-E8C3-F058C71584A8}"/>
+              </a:ext>
+            </a:extLst>
+          </p:cNvPr>
+          <p:cNvSpPr txBox="1">
+            <a:spLocks/>
+          </p:cNvSpPr>
+          <p:nvPr/>
+        </p:nvSpPr>
+        <p:spPr>
+          <a:xfrm>
+            <a:off x="3585074" y="6119426"/>
+            <a:ext cx="5357600" cy="738573"/>
+          </a:xfrm>
+          <a:prstGeom prst="rect">
+            <a:avLst/>
+          </a:prstGeom>
+        </p:spPr>
+        <p:txBody>
+          <a:bodyPr vert="horz" lIns="91440" tIns="0" rIns="91440" bIns="45720" rtlCol="0" anchor="b">
+            <a:normAutofit/>
+          </a:bodyPr>
+          <a:lstStyle>
+            <a:lvl1pPr marL="0" indent="0" algn="r" defTabSz="914400" rtl="0" eaLnBrk="1" latinLnBrk="0" hangingPunct="1">
+              <a:lnSpc>
+                <a:spcPct val="120000"/>
+              </a:lnSpc>
+              <a:spcBef>
+                <a:spcPts val="500"/>
+              </a:spcBef>
+              <a:spcAft>
+                <a:spcPts val="600"/>
+              </a:spcAft>
+              <a:buClr>
+                <a:schemeClr val="accent6"/>
+              </a:buClr>
+              <a:buSzPct val="90000"/>
+              <a:buFont typeface="Wingdings" panose="05000000000000000000" pitchFamily="2" charset="2"/>
+              <a:buNone/>
+              <a:defRPr sz="1800" b="0" kern="1200">
+                <a:solidFill>
+                  <a:schemeClr val="tx1"/>
+                </a:solidFill>
+                <a:effectLst/>
+                <a:latin typeface="+mn-lt"/>
+                <a:ea typeface="+mn-ea"/>
+                <a:cs typeface="+mn-cs"/>
+              </a:defRPr>
+            </a:lvl1pPr>
+            <a:lvl2pPr marL="457200" indent="0" algn="ctr" defTabSz="914400" rtl="0" eaLnBrk="1" latinLnBrk="0" hangingPunct="1">
+              <a:lnSpc>
+                <a:spcPct val="120000"/>
+              </a:lnSpc>
+              <a:spcBef>
+                <a:spcPts val="500"/>
+              </a:spcBef>
+              <a:spcAft>
+                <a:spcPts val="600"/>
+              </a:spcAft>
+              <a:buClr>
+                <a:schemeClr val="accent6"/>
+              </a:buClr>
+              <a:buSzPct val="90000"/>
+              <a:buFont typeface="Wingdings" panose="05000000000000000000" pitchFamily="2" charset="2"/>
+              <a:buNone/>
+              <a:defRPr sz="1800" kern="1200">
+                <a:solidFill>
+                  <a:schemeClr val="tx1"/>
+                </a:solidFill>
+                <a:effectLst/>
+                <a:latin typeface="+mn-lt"/>
+                <a:ea typeface="+mn-ea"/>
+                <a:cs typeface="+mn-cs"/>
+              </a:defRPr>
+            </a:lvl2pPr>
+            <a:lvl3pPr marL="914400" indent="0" algn="ctr" defTabSz="914400" rtl="0" eaLnBrk="1" latinLnBrk="0" hangingPunct="1">
+              <a:lnSpc>
+                <a:spcPct val="120000"/>
+              </a:lnSpc>
+              <a:spcBef>
+                <a:spcPts val="500"/>
+              </a:spcBef>
+              <a:spcAft>
+                <a:spcPts val="600"/>
+              </a:spcAft>
+              <a:buClr>
+                <a:schemeClr val="accent6"/>
+              </a:buClr>
+              <a:buSzPct val="90000"/>
+              <a:buFont typeface="Wingdings" panose="05000000000000000000" pitchFamily="2" charset="2"/>
+              <a:buNone/>
+              <a:defRPr sz="1800" kern="1200">
+                <a:solidFill>
+                  <a:schemeClr val="tx1"/>
+                </a:solidFill>
+                <a:effectLst/>
+                <a:latin typeface="+mn-lt"/>
+                <a:ea typeface="+mn-ea"/>
+                <a:cs typeface="+mn-cs"/>
+              </a:defRPr>
+            </a:lvl3pPr>
+            <a:lvl4pPr marL="1371600" indent="0" algn="ctr" defTabSz="914400" rtl="0" eaLnBrk="1" latinLnBrk="0" hangingPunct="1">
+              <a:lnSpc>
+                <a:spcPct val="120000"/>
+              </a:lnSpc>
+              <a:spcBef>
+                <a:spcPts val="500"/>
+              </a:spcBef>
+              <a:spcAft>
+                <a:spcPts val="600"/>
+              </a:spcAft>
+              <a:buClr>
+                <a:schemeClr val="accent6"/>
+              </a:buClr>
+              <a:buSzPct val="90000"/>
+              <a:buFont typeface="Wingdings" panose="05000000000000000000" pitchFamily="2" charset="2"/>
+              <a:buNone/>
+              <a:defRPr sz="1600" kern="1200">
+                <a:solidFill>
+                  <a:schemeClr val="tx1"/>
+                </a:solidFill>
+                <a:effectLst/>
+                <a:latin typeface="+mn-lt"/>
+                <a:ea typeface="+mn-ea"/>
+                <a:cs typeface="+mn-cs"/>
+              </a:defRPr>
+            </a:lvl4pPr>
+            <a:lvl5pPr marL="1828800" indent="0" algn="ctr" defTabSz="914400" rtl="0" eaLnBrk="1" latinLnBrk="0" hangingPunct="1">
+              <a:lnSpc>
+                <a:spcPct val="120000"/>
+              </a:lnSpc>
+              <a:spcBef>
+                <a:spcPts val="500"/>
+              </a:spcBef>
+              <a:spcAft>
+                <a:spcPts val="600"/>
+              </a:spcAft>
+              <a:buClr>
+                <a:schemeClr val="accent6"/>
+              </a:buClr>
+              <a:buSzPct val="90000"/>
+              <a:buFont typeface="Wingdings" panose="05000000000000000000" pitchFamily="2" charset="2"/>
+              <a:buNone/>
+              <a:defRPr sz="1600" kern="1200">
+                <a:solidFill>
+                  <a:schemeClr val="tx1"/>
+                </a:solidFill>
+                <a:effectLst/>
+                <a:latin typeface="+mn-lt"/>
+                <a:ea typeface="+mn-ea"/>
+                <a:cs typeface="+mn-cs"/>
+              </a:defRPr>
+            </a:lvl5pPr>
+            <a:lvl6pPr marL="2286000" indent="0" algn="ctr" defTabSz="914400" rtl="0" eaLnBrk="1" latinLnBrk="0" hangingPunct="1">
+              <a:lnSpc>
+                <a:spcPct val="120000"/>
+              </a:lnSpc>
+              <a:spcBef>
+                <a:spcPts val="500"/>
+              </a:spcBef>
+              <a:spcAft>
+                <a:spcPts val="600"/>
+              </a:spcAft>
+              <a:buClr>
+                <a:schemeClr val="accent6"/>
+              </a:buClr>
+              <a:buSzPct val="90000"/>
+              <a:buFont typeface="Wingdings" panose="05000000000000000000" pitchFamily="2" charset="2"/>
+              <a:buNone/>
+              <a:defRPr sz="1600" kern="1200">
+                <a:solidFill>
+                  <a:schemeClr val="tx1"/>
+                </a:solidFill>
+                <a:effectLst/>
+                <a:latin typeface="+mn-lt"/>
+                <a:ea typeface="+mn-ea"/>
+                <a:cs typeface="+mn-cs"/>
+              </a:defRPr>
+            </a:lvl6pPr>
+            <a:lvl7pPr marL="2743200" indent="0" algn="ctr" defTabSz="914400" rtl="0" eaLnBrk="1" latinLnBrk="0" hangingPunct="1">
+              <a:lnSpc>
+                <a:spcPct val="120000"/>
+              </a:lnSpc>
+              <a:spcBef>
+                <a:spcPts val="500"/>
+              </a:spcBef>
+              <a:spcAft>
+                <a:spcPts val="600"/>
+              </a:spcAft>
+              <a:buClr>
+                <a:schemeClr val="accent6"/>
+              </a:buClr>
+              <a:buSzPct val="90000"/>
+              <a:buFont typeface="Wingdings" panose="05000000000000000000" pitchFamily="2" charset="2"/>
+              <a:buNone/>
+              <a:defRPr sz="1600" kern="1200">
+                <a:solidFill>
+                  <a:schemeClr val="tx1"/>
+                </a:solidFill>
+                <a:effectLst/>
+                <a:latin typeface="+mn-lt"/>
+                <a:ea typeface="+mn-ea"/>
+                <a:cs typeface="+mn-cs"/>
+              </a:defRPr>
+            </a:lvl7pPr>
+            <a:lvl8pPr marL="3200400" indent="0" algn="ctr" defTabSz="914400" rtl="0" eaLnBrk="1" latinLnBrk="0" hangingPunct="1">
+              <a:lnSpc>
+                <a:spcPct val="120000"/>
+              </a:lnSpc>
+              <a:spcBef>
+                <a:spcPts val="500"/>
+              </a:spcBef>
+              <a:spcAft>
+                <a:spcPts val="600"/>
+              </a:spcAft>
+              <a:buClr>
+                <a:schemeClr val="accent6"/>
+              </a:buClr>
+              <a:buSzPct val="90000"/>
+              <a:buFont typeface="Wingdings" panose="05000000000000000000" pitchFamily="2" charset="2"/>
+              <a:buNone/>
+              <a:defRPr sz="1600" kern="1200">
+                <a:solidFill>
+                  <a:schemeClr val="tx1"/>
+                </a:solidFill>
+                <a:effectLst/>
+                <a:latin typeface="+mn-lt"/>
+                <a:ea typeface="+mn-ea"/>
+                <a:cs typeface="+mn-cs"/>
+              </a:defRPr>
+            </a:lvl8pPr>
+            <a:lvl9pPr marL="3657600" indent="0" algn="ctr" defTabSz="914400" rtl="0" eaLnBrk="1" latinLnBrk="0" hangingPunct="1">
+              <a:lnSpc>
+                <a:spcPct val="120000"/>
+              </a:lnSpc>
+              <a:spcBef>
+                <a:spcPts val="500"/>
+              </a:spcBef>
+              <a:spcAft>
+                <a:spcPts val="600"/>
+              </a:spcAft>
+              <a:buClr>
+                <a:schemeClr val="accent6"/>
+              </a:buClr>
+              <a:buSzPct val="90000"/>
+              <a:buFont typeface="Wingdings" panose="05000000000000000000" pitchFamily="2" charset="2"/>
+              <a:buNone/>
+              <a:defRPr sz="1600" kern="1200">
+                <a:solidFill>
+                  <a:schemeClr val="tx1"/>
+                </a:solidFill>
+                <a:effectLst/>
+                <a:latin typeface="+mn-lt"/>
+                <a:ea typeface="+mn-ea"/>
+                <a:cs typeface="+mn-cs"/>
+              </a:defRPr>
+            </a:lvl9pPr>
+          </a:lstStyle>
+          <a:p>
+            <a:r>
+              <a:rPr lang="en-US">
+                <a:solidFill>
+                  <a:schemeClr val="accent6"/>
+                </a:solidFill>
+                <a:cs typeface="Arial"/>
+              </a:rPr>
+              <a:t>Project 3</a:t>
+            </a:r>
           </a:p>
         </p:txBody>
       </p:sp>
@@ -11163,7 +11491,13 @@
               <a:rPr lang="en-US" i="1">
                 <a:cs typeface="Arial" panose="020B0604020202020204"/>
               </a:rPr>
-              <a:t>Stratify data into males and females</a:t>
+              <a:t>Stratified</a:t>
+            </a:r>
+            <a:r>
+              <a:rPr lang="en-US" i="1" dirty="0">
+                <a:cs typeface="Arial" panose="020B0604020202020204"/>
+              </a:rPr>
+              <a:t> by sex</a:t>
             </a:r>
           </a:p>
           <a:p>
@@ -11180,7 +11514,7 @@
               <a:rPr lang="en-US" b="1">
                 <a:cs typeface="Arial" panose="020B0604020202020204"/>
               </a:rPr>
-              <a:t>Primary Analysis</a:t>
+              <a:t>Primary Analyses</a:t>
             </a:r>
             <a:endParaRPr lang="en-US" b="1" dirty="0">
               <a:cs typeface="Arial" panose="020B0604020202020204"/>
@@ -11569,10 +11903,10 @@
       </p:pic>
       <p:pic>
         <p:nvPicPr>
-          <p:cNvPr id="3" name="Picture 2" descr="risk_profiles.png">
+          <p:cNvPr id="2" name="Picture 1" descr="risk_profiles.png">
             <a:extLst>
               <a:ext uri="{FF2B5EF4-FFF2-40B4-BE49-F238E27FC236}">
-                <a16:creationId xmlns:a16="http://schemas.microsoft.com/office/drawing/2014/main" id="{41E7286F-4F10-4E99-4EE7-FF84455A638F}"/>
+                <a16:creationId xmlns:a16="http://schemas.microsoft.com/office/drawing/2014/main" id="{A48DA032-433E-39A8-9953-4534719D0F01}"/>
               </a:ext>
             </a:extLst>
           </p:cNvPr>
@@ -11589,8 +11923,8 @@
         </p:blipFill>
         <p:spPr>
           <a:xfrm>
-            <a:off x="5520690" y="1374140"/>
-            <a:ext cx="5722620" cy="4109720"/>
+            <a:off x="5545980" y="1262380"/>
+            <a:ext cx="5682200" cy="4328160"/>
           </a:xfrm>
           <a:prstGeom prst="rect">
             <a:avLst/>
